--- a/Modul Minna 2/Bab 38/38. Minna 2 Tata Bahasa Bab 38 - Slide.pptx
+++ b/Modul Minna 2/Bab 38/38. Minna 2 Tata Bahasa Bab 38 - Slide.pptx
@@ -4069,7 +4069,7 @@
                 <a:ea typeface="Arial" pitchFamily="34" charset="-122"/>
                 <a:cs typeface="Arial" pitchFamily="34" charset="-120"/>
               </a:rPr>
-              <a:t>Apakah Anda tahu bahwa Sdr. Budi akan menikah?</a:t>
+              <a:t>Apakah Anda tahu bahwa Budi akan menikah?</a:t>
             </a:r>
             <a:endParaRPr lang="en-US" sz="950" dirty="0"/>
           </a:p>
@@ -4616,7 +4616,7 @@
                 <a:ea typeface="Arial" pitchFamily="34" charset="-122"/>
                 <a:cs typeface="Arial" pitchFamily="34" charset="-120"/>
               </a:rPr>
-              <a:t>うまれたのはチェンマイです。</a:t>
+              <a:t>うまれたのはソロです。</a:t>
             </a:r>
             <a:endParaRPr lang="en-US" sz="1700" dirty="0"/>
           </a:p>
@@ -4655,7 +4655,7 @@
                 <a:ea typeface="Arial" pitchFamily="34" charset="-122"/>
                 <a:cs typeface="Arial" pitchFamily="34" charset="-120"/>
               </a:rPr>
-              <a:t>umareta no wa Chenmai desu</a:t>
+              <a:t>umareta no wa Solo desu</a:t>
             </a:r>
             <a:pPr indent="0" marL="0">
               <a:buNone/>
@@ -4683,7 +4683,7 @@
                 <a:ea typeface="Arial" pitchFamily="34" charset="-122"/>
                 <a:cs typeface="Arial" pitchFamily="34" charset="-120"/>
               </a:rPr>
-              <a:t>Yang (tempat) lahir saya adalah Chiang Mai.</a:t>
+              <a:t>Yang (tempat) lahir saya adalah Solo.</a:t>
             </a:r>
             <a:endParaRPr lang="en-US" sz="950" dirty="0"/>
           </a:p>
